--- a/resources/ppt_first_paper.pptx
+++ b/resources/ppt_first_paper.pptx
@@ -5,7 +5,7 @@
     <p:sldMasterId id="2147483648" r:id="rId1"/>
   </p:sldMasterIdLst>
   <p:notesMasterIdLst>
-    <p:notesMasterId r:id="rId21"/>
+    <p:notesMasterId r:id="rId22"/>
   </p:notesMasterIdLst>
   <p:sldIdLst>
     <p:sldId id="256" r:id="rId2"/>
@@ -25,8 +25,9 @@
     <p:sldId id="266" r:id="rId16"/>
     <p:sldId id="269" r:id="rId17"/>
     <p:sldId id="270" r:id="rId18"/>
-    <p:sldId id="303" r:id="rId19"/>
-    <p:sldId id="267" r:id="rId20"/>
+    <p:sldId id="321" r:id="rId19"/>
+    <p:sldId id="303" r:id="rId20"/>
+    <p:sldId id="267" r:id="rId21"/>
   </p:sldIdLst>
   <p:sldSz cx="12192000" cy="6858000"/>
   <p:notesSz cx="6858000" cy="9144000"/>
@@ -215,7 +216,7 @@
           <a:p>
             <a:fld id="{BD70B21E-5D10-4D67-B2AA-B5F16B5D6DF5}" type="datetimeFigureOut">
               <a:rPr lang="en-US" smtClean="0"/>
-              <a:t>11/15/2024</a:t>
+              <a:t>11/18/2024</a:t>
             </a:fld>
             <a:endParaRPr lang="en-US"/>
           </a:p>
@@ -1190,6 +1191,99 @@
           <a:bodyPr/>
           <a:lstStyle/>
           <a:p>
+            <a:r>
+              <a:rPr lang="en-US" dirty="0"/>
+              <a:t>My plants grow too fast ?</a:t>
+            </a:r>
+          </a:p>
+          <a:p>
+            <a:r>
+              <a:rPr lang="en-US" dirty="0"/>
+              <a:t>Canopy closure early ?</a:t>
+            </a:r>
+          </a:p>
+        </p:txBody>
+      </p:sp>
+      <p:sp>
+        <p:nvSpPr>
+          <p:cNvPr id="4" name="Slide Number Placeholder 3"/>
+          <p:cNvSpPr>
+            <a:spLocks noGrp="1"/>
+          </p:cNvSpPr>
+          <p:nvPr>
+            <p:ph type="sldNum" sz="quarter" idx="5"/>
+          </p:nvPr>
+        </p:nvSpPr>
+        <p:spPr/>
+        <p:txBody>
+          <a:bodyPr/>
+          <a:lstStyle/>
+          <a:p>
+            <a:fld id="{A9A0A799-F059-4133-8369-1F74AA1BF689}" type="slidenum">
+              <a:rPr lang="en-US" smtClean="0"/>
+              <a:t>18</a:t>
+            </a:fld>
+            <a:endParaRPr lang="en-US"/>
+          </a:p>
+        </p:txBody>
+      </p:sp>
+    </p:spTree>
+    <p:extLst>
+      <p:ext uri="{BB962C8B-B14F-4D97-AF65-F5344CB8AC3E}">
+        <p14:creationId xmlns:p14="http://schemas.microsoft.com/office/powerpoint/2010/main" val="1984290839"/>
+      </p:ext>
+    </p:extLst>
+  </p:cSld>
+  <p:clrMapOvr>
+    <a:masterClrMapping/>
+  </p:clrMapOvr>
+</p:notes>
+</file>
+
+<file path=ppt/notesSlides/notesSlide6.xml><?xml version="1.0" encoding="utf-8"?>
+<p:notes xmlns:a="http://schemas.openxmlformats.org/drawingml/2006/main" xmlns:r="http://schemas.openxmlformats.org/officeDocument/2006/relationships" xmlns:p="http://schemas.openxmlformats.org/presentationml/2006/main">
+  <p:cSld>
+    <p:spTree>
+      <p:nvGrpSpPr>
+        <p:cNvPr id="1" name=""/>
+        <p:cNvGrpSpPr/>
+        <p:nvPr/>
+      </p:nvGrpSpPr>
+      <p:grpSpPr>
+        <a:xfrm>
+          <a:off x="0" y="0"/>
+          <a:ext cx="0" cy="0"/>
+          <a:chOff x="0" y="0"/>
+          <a:chExt cx="0" cy="0"/>
+        </a:xfrm>
+      </p:grpSpPr>
+      <p:sp>
+        <p:nvSpPr>
+          <p:cNvPr id="2" name="Slide Image Placeholder 1"/>
+          <p:cNvSpPr>
+            <a:spLocks noGrp="1" noRot="1" noChangeAspect="1"/>
+          </p:cNvSpPr>
+          <p:nvPr>
+            <p:ph type="sldImg"/>
+          </p:nvPr>
+        </p:nvSpPr>
+        <p:spPr/>
+      </p:sp>
+      <p:sp>
+        <p:nvSpPr>
+          <p:cNvPr id="3" name="Notes Placeholder 2"/>
+          <p:cNvSpPr>
+            <a:spLocks noGrp="1"/>
+          </p:cNvSpPr>
+          <p:nvPr>
+            <p:ph type="body" idx="1"/>
+          </p:nvPr>
+        </p:nvSpPr>
+        <p:spPr/>
+        <p:txBody>
+          <a:bodyPr/>
+          <a:lstStyle/>
+          <a:p>
             <a:pPr marL="0" indent="0">
               <a:buNone/>
             </a:pPr>
@@ -1354,7 +1448,7 @@
           <a:p>
             <a:fld id="{A9A0A799-F059-4133-8369-1F74AA1BF689}" type="slidenum">
               <a:rPr lang="en-US" smtClean="0"/>
-              <a:t>18</a:t>
+              <a:t>19</a:t>
             </a:fld>
             <a:endParaRPr lang="en-US"/>
           </a:p>
@@ -1520,7 +1614,7 @@
           <a:p>
             <a:fld id="{7E4D1F74-A6F3-404E-BDC7-F4333547AFC5}" type="datetime1">
               <a:rPr lang="en-US" smtClean="0"/>
-              <a:t>11/15/2024</a:t>
+              <a:t>11/18/2024</a:t>
             </a:fld>
             <a:endParaRPr lang="en-US"/>
           </a:p>
@@ -1718,7 +1812,7 @@
           <a:p>
             <a:fld id="{A9A3BC48-04C9-4793-98FC-622638BB236C}" type="datetime1">
               <a:rPr lang="en-US" smtClean="0"/>
-              <a:t>11/15/2024</a:t>
+              <a:t>11/18/2024</a:t>
             </a:fld>
             <a:endParaRPr lang="en-US"/>
           </a:p>
@@ -1926,7 +2020,7 @@
           <a:p>
             <a:fld id="{70B8B28E-41C6-4AF3-8594-898D986E9E6E}" type="datetime1">
               <a:rPr lang="en-US" smtClean="0"/>
-              <a:t>11/15/2024</a:t>
+              <a:t>11/18/2024</a:t>
             </a:fld>
             <a:endParaRPr lang="en-US"/>
           </a:p>
@@ -2124,7 +2218,7 @@
           <a:p>
             <a:fld id="{6B672423-A6E0-415E-80EC-C98D7BABBA88}" type="datetime1">
               <a:rPr lang="en-US" smtClean="0"/>
-              <a:t>11/15/2024</a:t>
+              <a:t>11/18/2024</a:t>
             </a:fld>
             <a:endParaRPr lang="en-US"/>
           </a:p>
@@ -2399,7 +2493,7 @@
           <a:p>
             <a:fld id="{FF6ED73A-8C86-4FCB-9A91-E8C51402F3A2}" type="datetime1">
               <a:rPr lang="en-US" smtClean="0"/>
-              <a:t>11/15/2024</a:t>
+              <a:t>11/18/2024</a:t>
             </a:fld>
             <a:endParaRPr lang="en-US"/>
           </a:p>
@@ -2664,7 +2758,7 @@
           <a:p>
             <a:fld id="{DB15C31A-116B-46B1-BCEF-7A27890F74C4}" type="datetime1">
               <a:rPr lang="en-US" smtClean="0"/>
-              <a:t>11/15/2024</a:t>
+              <a:t>11/18/2024</a:t>
             </a:fld>
             <a:endParaRPr lang="en-US"/>
           </a:p>
@@ -3076,7 +3170,7 @@
           <a:p>
             <a:fld id="{54250EC2-844E-41B5-BBDF-73A89F6588DF}" type="datetime1">
               <a:rPr lang="en-US" smtClean="0"/>
-              <a:t>11/15/2024</a:t>
+              <a:t>11/18/2024</a:t>
             </a:fld>
             <a:endParaRPr lang="en-US"/>
           </a:p>
@@ -3217,7 +3311,7 @@
           <a:p>
             <a:fld id="{CE82E0A7-92AF-4745-BCA1-599ECD02E67F}" type="datetime1">
               <a:rPr lang="en-US" smtClean="0"/>
-              <a:t>11/15/2024</a:t>
+              <a:t>11/18/2024</a:t>
             </a:fld>
             <a:endParaRPr lang="en-US"/>
           </a:p>
@@ -3330,7 +3424,7 @@
           <a:p>
             <a:fld id="{9D35E66C-7C8E-4FED-A762-7062D27E2111}" type="datetime1">
               <a:rPr lang="en-US" smtClean="0"/>
-              <a:t>11/15/2024</a:t>
+              <a:t>11/18/2024</a:t>
             </a:fld>
             <a:endParaRPr lang="en-US"/>
           </a:p>
@@ -3641,7 +3735,7 @@
           <a:p>
             <a:fld id="{74FDD5E7-8180-49E2-853B-8300CA7870D9}" type="datetime1">
               <a:rPr lang="en-US" smtClean="0"/>
-              <a:t>11/15/2024</a:t>
+              <a:t>11/18/2024</a:t>
             </a:fld>
             <a:endParaRPr lang="en-US"/>
           </a:p>
@@ -3929,7 +4023,7 @@
           <a:p>
             <a:fld id="{18F7B161-BA87-40A6-B2A2-26EB11F75897}" type="datetime1">
               <a:rPr lang="en-US" smtClean="0"/>
-              <a:t>11/15/2024</a:t>
+              <a:t>11/18/2024</a:t>
             </a:fld>
             <a:endParaRPr lang="en-US"/>
           </a:p>
@@ -4170,7 +4264,7 @@
           <a:p>
             <a:fld id="{ADD9512A-AD81-4E5D-AC91-CE42C6763460}" type="datetime1">
               <a:rPr lang="en-US" smtClean="0"/>
-              <a:t>11/15/2024</a:t>
+              <a:t>11/18/2024</a:t>
             </a:fld>
             <a:endParaRPr lang="en-US"/>
           </a:p>
@@ -16101,6 +16195,437 @@
       </p:grpSpPr>
       <p:sp>
         <p:nvSpPr>
+          <p:cNvPr id="2" name="Title 1">
+            <a:extLst>
+              <a:ext uri="{FF2B5EF4-FFF2-40B4-BE49-F238E27FC236}">
+                <a16:creationId xmlns:a16="http://schemas.microsoft.com/office/drawing/2014/main" id="{DE8CBF3D-1E17-4F4F-8781-11F723C7F5FF}"/>
+              </a:ext>
+            </a:extLst>
+          </p:cNvPr>
+          <p:cNvSpPr>
+            <a:spLocks noGrp="1"/>
+          </p:cNvSpPr>
+          <p:nvPr>
+            <p:ph type="title"/>
+          </p:nvPr>
+        </p:nvSpPr>
+        <p:spPr>
+          <a:xfrm>
+            <a:off x="838200" y="275917"/>
+            <a:ext cx="10515600" cy="1325563"/>
+          </a:xfrm>
+        </p:spPr>
+        <p:txBody>
+          <a:bodyPr/>
+          <a:lstStyle/>
+          <a:p>
+            <a:r>
+              <a:rPr lang="en-US" dirty="0"/>
+              <a:t>Preliminary results: PAR intercepted in sorghum monocrop</a:t>
+            </a:r>
+          </a:p>
+        </p:txBody>
+      </p:sp>
+      <p:sp>
+        <p:nvSpPr>
+          <p:cNvPr id="4" name="Slide Number Placeholder 3">
+            <a:extLst>
+              <a:ext uri="{FF2B5EF4-FFF2-40B4-BE49-F238E27FC236}">
+                <a16:creationId xmlns:a16="http://schemas.microsoft.com/office/drawing/2014/main" id="{5C428F43-7EEE-4605-AD21-4AE0AF44BA1E}"/>
+              </a:ext>
+            </a:extLst>
+          </p:cNvPr>
+          <p:cNvSpPr>
+            <a:spLocks noGrp="1"/>
+          </p:cNvSpPr>
+          <p:nvPr>
+            <p:ph type="sldNum" sz="quarter" idx="12"/>
+          </p:nvPr>
+        </p:nvSpPr>
+        <p:spPr/>
+        <p:txBody>
+          <a:bodyPr/>
+          <a:lstStyle/>
+          <a:p>
+            <a:fld id="{27C6CCC6-2BE5-4E42-96A4-D1E8E81A3D8E}" type="slidenum">
+              <a:rPr lang="fr-FR" smtClean="0"/>
+              <a:t>18</a:t>
+            </a:fld>
+            <a:endParaRPr lang="fr-FR"/>
+          </a:p>
+        </p:txBody>
+      </p:sp>
+      <p:pic>
+        <p:nvPicPr>
+          <p:cNvPr id="10" name="Content Placeholder 9">
+            <a:extLst>
+              <a:ext uri="{FF2B5EF4-FFF2-40B4-BE49-F238E27FC236}">
+                <a16:creationId xmlns:a16="http://schemas.microsoft.com/office/drawing/2014/main" id="{5763B788-8956-42F9-9610-D654D8B62F94}"/>
+              </a:ext>
+            </a:extLst>
+          </p:cNvPr>
+          <p:cNvPicPr>
+            <a:picLocks noGrp="1" noChangeAspect="1"/>
+          </p:cNvPicPr>
+          <p:nvPr>
+            <p:ph idx="1"/>
+          </p:nvPr>
+        </p:nvPicPr>
+        <p:blipFill>
+          <a:blip r:embed="rId3">
+            <a:extLst>
+              <a:ext uri="{28A0092B-C50C-407E-A947-70E740481C1C}">
+                <a14:useLocalDpi xmlns:a14="http://schemas.microsoft.com/office/drawing/2010/main" val="0"/>
+              </a:ext>
+            </a:extLst>
+          </a:blip>
+          <a:stretch>
+            <a:fillRect/>
+          </a:stretch>
+        </p:blipFill>
+        <p:spPr>
+          <a:xfrm>
+            <a:off x="2956932" y="1494234"/>
+            <a:ext cx="6278135" cy="4917872"/>
+          </a:xfrm>
+        </p:spPr>
+      </p:pic>
+      <p:sp>
+        <p:nvSpPr>
+          <p:cNvPr id="11" name="TextBox 10">
+            <a:extLst>
+              <a:ext uri="{FF2B5EF4-FFF2-40B4-BE49-F238E27FC236}">
+                <a16:creationId xmlns:a16="http://schemas.microsoft.com/office/drawing/2014/main" id="{50BA28D9-8C75-4C9A-8D2D-468E5DC51FCD}"/>
+              </a:ext>
+            </a:extLst>
+          </p:cNvPr>
+          <p:cNvSpPr txBox="1"/>
+          <p:nvPr/>
+        </p:nvSpPr>
+        <p:spPr>
+          <a:xfrm>
+            <a:off x="5798630" y="6391685"/>
+            <a:ext cx="1449662" cy="369332"/>
+          </a:xfrm>
+          <a:prstGeom prst="rect">
+            <a:avLst/>
+          </a:prstGeom>
+          <a:noFill/>
+        </p:spPr>
+        <p:txBody>
+          <a:bodyPr wrap="square" rtlCol="0">
+            <a:spAutoFit/>
+          </a:bodyPr>
+          <a:lstStyle/>
+          <a:p>
+            <a:r>
+              <a:rPr lang="en-US" dirty="0"/>
+              <a:t>Density = 10</a:t>
+            </a:r>
+          </a:p>
+        </p:txBody>
+      </p:sp>
+      <p:cxnSp>
+        <p:nvCxnSpPr>
+          <p:cNvPr id="14" name="Straight Arrow Connector 13">
+            <a:extLst>
+              <a:ext uri="{FF2B5EF4-FFF2-40B4-BE49-F238E27FC236}">
+                <a16:creationId xmlns:a16="http://schemas.microsoft.com/office/drawing/2014/main" id="{67A414C8-BFBA-4A7F-BD14-9C7A252A9E2F}"/>
+              </a:ext>
+            </a:extLst>
+          </p:cNvPr>
+          <p:cNvCxnSpPr/>
+          <p:nvPr/>
+        </p:nvCxnSpPr>
+        <p:spPr>
+          <a:xfrm>
+            <a:off x="9489688" y="2553629"/>
+            <a:ext cx="0" cy="2698595"/>
+          </a:xfrm>
+          <a:prstGeom prst="straightConnector1">
+            <a:avLst/>
+          </a:prstGeom>
+          <a:ln>
+            <a:headEnd type="triangle"/>
+            <a:tailEnd type="triangle"/>
+          </a:ln>
+        </p:spPr>
+        <p:style>
+          <a:lnRef idx="2">
+            <a:schemeClr val="dk1"/>
+          </a:lnRef>
+          <a:fillRef idx="0">
+            <a:schemeClr val="dk1"/>
+          </a:fillRef>
+          <a:effectRef idx="1">
+            <a:schemeClr val="dk1"/>
+          </a:effectRef>
+          <a:fontRef idx="minor">
+            <a:schemeClr val="tx1"/>
+          </a:fontRef>
+        </p:style>
+      </p:cxnSp>
+      <p:sp>
+        <p:nvSpPr>
+          <p:cNvPr id="15" name="TextBox 14">
+            <a:extLst>
+              <a:ext uri="{FF2B5EF4-FFF2-40B4-BE49-F238E27FC236}">
+                <a16:creationId xmlns:a16="http://schemas.microsoft.com/office/drawing/2014/main" id="{2C4D47FB-A779-4C01-878A-95502E3049D7}"/>
+              </a:ext>
+            </a:extLst>
+          </p:cNvPr>
+          <p:cNvSpPr txBox="1"/>
+          <p:nvPr/>
+        </p:nvSpPr>
+        <p:spPr>
+          <a:xfrm>
+            <a:off x="9868829" y="3429000"/>
+            <a:ext cx="1728438" cy="646331"/>
+          </a:xfrm>
+          <a:prstGeom prst="rect">
+            <a:avLst/>
+          </a:prstGeom>
+          <a:noFill/>
+        </p:spPr>
+        <p:txBody>
+          <a:bodyPr wrap="square" rtlCol="0">
+            <a:spAutoFit/>
+          </a:bodyPr>
+          <a:lstStyle/>
+          <a:p>
+            <a:r>
+              <a:rPr lang="en-US" dirty="0"/>
+              <a:t>~ 15 MJ/m</a:t>
+            </a:r>
+            <a:r>
+              <a:rPr lang="fr-FR" dirty="0"/>
+              <a:t>² at the </a:t>
+            </a:r>
+            <a:r>
+              <a:rPr lang="fr-FR" dirty="0" err="1"/>
+              <a:t>largest</a:t>
+            </a:r>
+            <a:endParaRPr lang="en-US" dirty="0"/>
+          </a:p>
+        </p:txBody>
+      </p:sp>
+      <p:sp>
+        <p:nvSpPr>
+          <p:cNvPr id="16" name="Oval 15">
+            <a:extLst>
+              <a:ext uri="{FF2B5EF4-FFF2-40B4-BE49-F238E27FC236}">
+                <a16:creationId xmlns:a16="http://schemas.microsoft.com/office/drawing/2014/main" id="{261C881A-16BF-4198-962E-82B9FC8F7CA3}"/>
+              </a:ext>
+            </a:extLst>
+          </p:cNvPr>
+          <p:cNvSpPr/>
+          <p:nvPr/>
+        </p:nvSpPr>
+        <p:spPr>
+          <a:xfrm>
+            <a:off x="3902927" y="2988527"/>
+            <a:ext cx="2085278" cy="3504348"/>
+          </a:xfrm>
+          <a:prstGeom prst="ellipse">
+            <a:avLst/>
+          </a:prstGeom>
+          <a:noFill/>
+          <a:ln>
+            <a:solidFill>
+              <a:schemeClr val="tx1"/>
+            </a:solidFill>
+          </a:ln>
+        </p:spPr>
+        <p:style>
+          <a:lnRef idx="2">
+            <a:schemeClr val="accent1">
+              <a:shade val="50000"/>
+            </a:schemeClr>
+          </a:lnRef>
+          <a:fillRef idx="1">
+            <a:schemeClr val="accent1"/>
+          </a:fillRef>
+          <a:effectRef idx="0">
+            <a:schemeClr val="accent1"/>
+          </a:effectRef>
+          <a:fontRef idx="minor">
+            <a:schemeClr val="lt1"/>
+          </a:fontRef>
+        </p:style>
+        <p:txBody>
+          <a:bodyPr rtlCol="0" anchor="ctr"/>
+          <a:lstStyle/>
+          <a:p>
+            <a:pPr algn="ctr"/>
+            <a:endParaRPr lang="en-US"/>
+          </a:p>
+        </p:txBody>
+      </p:sp>
+      <p:sp>
+        <p:nvSpPr>
+          <p:cNvPr id="17" name="TextBox 16">
+            <a:extLst>
+              <a:ext uri="{FF2B5EF4-FFF2-40B4-BE49-F238E27FC236}">
+                <a16:creationId xmlns:a16="http://schemas.microsoft.com/office/drawing/2014/main" id="{0D292ABD-0662-4EC9-A6A6-7B33B7C8DBCD}"/>
+              </a:ext>
+            </a:extLst>
+          </p:cNvPr>
+          <p:cNvSpPr txBox="1"/>
+          <p:nvPr/>
+        </p:nvSpPr>
+        <p:spPr>
+          <a:xfrm>
+            <a:off x="4103648" y="2981519"/>
+            <a:ext cx="490653" cy="369332"/>
+          </a:xfrm>
+          <a:prstGeom prst="rect">
+            <a:avLst/>
+          </a:prstGeom>
+          <a:noFill/>
+        </p:spPr>
+        <p:txBody>
+          <a:bodyPr wrap="square" rtlCol="0">
+            <a:spAutoFit/>
+          </a:bodyPr>
+          <a:lstStyle/>
+          <a:p>
+            <a:r>
+              <a:rPr lang="en-US" dirty="0"/>
+              <a:t>?*</a:t>
+            </a:r>
+          </a:p>
+        </p:txBody>
+      </p:sp>
+      <p:sp>
+        <p:nvSpPr>
+          <p:cNvPr id="18" name="TextBox 17">
+            <a:extLst>
+              <a:ext uri="{FF2B5EF4-FFF2-40B4-BE49-F238E27FC236}">
+                <a16:creationId xmlns:a16="http://schemas.microsoft.com/office/drawing/2014/main" id="{832CDE79-248A-4B91-9A80-0DCD64807181}"/>
+              </a:ext>
+            </a:extLst>
+          </p:cNvPr>
+          <p:cNvSpPr txBox="1"/>
+          <p:nvPr/>
+        </p:nvSpPr>
+        <p:spPr>
+          <a:xfrm>
+            <a:off x="228602" y="1951672"/>
+            <a:ext cx="2456984" cy="4247317"/>
+          </a:xfrm>
+          <a:prstGeom prst="rect">
+            <a:avLst/>
+          </a:prstGeom>
+          <a:noFill/>
+        </p:spPr>
+        <p:txBody>
+          <a:bodyPr wrap="square" rtlCol="0">
+            <a:spAutoFit/>
+          </a:bodyPr>
+          <a:lstStyle/>
+          <a:p>
+            <a:r>
+              <a:rPr lang="en-US" dirty="0"/>
+              <a:t>*Pbs: </a:t>
+            </a:r>
+          </a:p>
+          <a:p>
+            <a:pPr marL="285750" indent="-285750">
+              <a:buFontTx/>
+              <a:buChar char="-"/>
+            </a:pPr>
+            <a:r>
+              <a:rPr lang="en-US" dirty="0"/>
+              <a:t>I might refine the implementation of the beginning of growth</a:t>
+            </a:r>
+          </a:p>
+          <a:p>
+            <a:pPr marL="285750" indent="-285750">
+              <a:buFontTx/>
+              <a:buChar char="-"/>
+            </a:pPr>
+            <a:r>
+              <a:rPr lang="en-US" dirty="0"/>
+              <a:t>I must consider </a:t>
+            </a:r>
+            <a:r>
+              <a:rPr lang="en-US" dirty="0" err="1"/>
+              <a:t>Eabs</a:t>
+            </a:r>
+            <a:r>
+              <a:rPr lang="en-US" dirty="0"/>
+              <a:t> and not </a:t>
+            </a:r>
+            <a:r>
+              <a:rPr lang="en-US" dirty="0" err="1"/>
+              <a:t>Ei</a:t>
+            </a:r>
+            <a:endParaRPr lang="en-US" dirty="0"/>
+          </a:p>
+          <a:p>
+            <a:pPr marL="285750" indent="-285750">
+              <a:buFontTx/>
+              <a:buChar char="-"/>
+            </a:pPr>
+            <a:r>
+              <a:rPr lang="en-US" dirty="0"/>
+              <a:t>Plot LAI to better understand</a:t>
+            </a:r>
+          </a:p>
+          <a:p>
+            <a:pPr marL="285750" indent="-285750">
+              <a:buFontTx/>
+              <a:buChar char="-"/>
+            </a:pPr>
+            <a:r>
+              <a:rPr lang="en-US" dirty="0"/>
+              <a:t>Plot individual curves for each set of parameters</a:t>
+            </a:r>
+          </a:p>
+          <a:p>
+            <a:pPr marL="285750" indent="-285750">
+              <a:buFontTx/>
+              <a:buChar char="-"/>
+            </a:pPr>
+            <a:r>
+              <a:rPr lang="en-US" dirty="0"/>
+              <a:t>Plot incoming PAR and PAR intercepted as % of incoming PAR</a:t>
+            </a:r>
+          </a:p>
+        </p:txBody>
+      </p:sp>
+    </p:spTree>
+    <p:extLst>
+      <p:ext uri="{BB962C8B-B14F-4D97-AF65-F5344CB8AC3E}">
+        <p14:creationId xmlns:p14="http://schemas.microsoft.com/office/powerpoint/2010/main" val="2526987213"/>
+      </p:ext>
+    </p:extLst>
+  </p:cSld>
+  <p:clrMapOvr>
+    <a:masterClrMapping/>
+  </p:clrMapOvr>
+</p:sld>
+</file>
+
+<file path=ppt/slides/slide19.xml><?xml version="1.0" encoding="utf-8"?>
+<p:sld xmlns:a="http://schemas.openxmlformats.org/drawingml/2006/main" xmlns:r="http://schemas.openxmlformats.org/officeDocument/2006/relationships" xmlns:p="http://schemas.openxmlformats.org/presentationml/2006/main">
+  <p:cSld>
+    <p:spTree>
+      <p:nvGrpSpPr>
+        <p:cNvPr id="1" name=""/>
+        <p:cNvGrpSpPr/>
+        <p:nvPr/>
+      </p:nvGrpSpPr>
+      <p:grpSpPr>
+        <a:xfrm>
+          <a:off x="0" y="0"/>
+          <a:ext cx="0" cy="0"/>
+          <a:chOff x="0" y="0"/>
+          <a:chExt cx="0" cy="0"/>
+        </a:xfrm>
+      </p:grpSpPr>
+      <p:sp>
+        <p:nvSpPr>
           <p:cNvPr id="13" name="Rectangle: Diagonal Corners Snipped 12">
             <a:extLst>
               <a:ext uri="{FF2B5EF4-FFF2-40B4-BE49-F238E27FC236}">
@@ -16417,7 +16942,7 @@
           <a:p>
             <a:fld id="{27C6CCC6-2BE5-4E42-96A4-D1E8E81A3D8E}" type="slidenum">
               <a:rPr lang="fr-FR" smtClean="0"/>
-              <a:t>18</a:t>
+              <a:t>19</a:t>
             </a:fld>
             <a:endParaRPr lang="fr-FR"/>
           </a:p>
@@ -16688,176 +17213,6 @@
     <p:extLst>
       <p:ext uri="{BB962C8B-B14F-4D97-AF65-F5344CB8AC3E}">
         <p14:creationId xmlns:p14="http://schemas.microsoft.com/office/powerpoint/2010/main" val="135246570"/>
-      </p:ext>
-    </p:extLst>
-  </p:cSld>
-  <p:clrMapOvr>
-    <a:masterClrMapping/>
-  </p:clrMapOvr>
-</p:sld>
-</file>
-
-<file path=ppt/slides/slide19.xml><?xml version="1.0" encoding="utf-8"?>
-<p:sld xmlns:a="http://schemas.openxmlformats.org/drawingml/2006/main" xmlns:r="http://schemas.openxmlformats.org/officeDocument/2006/relationships" xmlns:p="http://schemas.openxmlformats.org/presentationml/2006/main">
-  <p:cSld>
-    <p:spTree>
-      <p:nvGrpSpPr>
-        <p:cNvPr id="1" name=""/>
-        <p:cNvGrpSpPr/>
-        <p:nvPr/>
-      </p:nvGrpSpPr>
-      <p:grpSpPr>
-        <a:xfrm>
-          <a:off x="0" y="0"/>
-          <a:ext cx="0" cy="0"/>
-          <a:chOff x="0" y="0"/>
-          <a:chExt cx="0" cy="0"/>
-        </a:xfrm>
-      </p:grpSpPr>
-      <p:sp>
-        <p:nvSpPr>
-          <p:cNvPr id="2" name="Title 1">
-            <a:extLst>
-              <a:ext uri="{FF2B5EF4-FFF2-40B4-BE49-F238E27FC236}">
-                <a16:creationId xmlns:a16="http://schemas.microsoft.com/office/drawing/2014/main" id="{00BE5BAE-891E-4107-A029-0C9F76050246}"/>
-              </a:ext>
-            </a:extLst>
-          </p:cNvPr>
-          <p:cNvSpPr>
-            <a:spLocks noGrp="1"/>
-          </p:cNvSpPr>
-          <p:nvPr>
-            <p:ph type="title"/>
-          </p:nvPr>
-        </p:nvSpPr>
-        <p:spPr/>
-        <p:txBody>
-          <a:bodyPr/>
-          <a:lstStyle/>
-          <a:p>
-            <a:r>
-              <a:rPr lang="en-US" dirty="0"/>
-              <a:t>4.Discussion</a:t>
-            </a:r>
-          </a:p>
-        </p:txBody>
-      </p:sp>
-      <p:sp>
-        <p:nvSpPr>
-          <p:cNvPr id="3" name="Content Placeholder 2">
-            <a:extLst>
-              <a:ext uri="{FF2B5EF4-FFF2-40B4-BE49-F238E27FC236}">
-                <a16:creationId xmlns:a16="http://schemas.microsoft.com/office/drawing/2014/main" id="{8FDF802E-010F-4BCC-9936-3A1A1BCBA655}"/>
-              </a:ext>
-            </a:extLst>
-          </p:cNvPr>
-          <p:cNvSpPr>
-            <a:spLocks noGrp="1"/>
-          </p:cNvSpPr>
-          <p:nvPr>
-            <p:ph idx="1"/>
-          </p:nvPr>
-        </p:nvSpPr>
-        <p:spPr/>
-        <p:txBody>
-          <a:bodyPr/>
-          <a:lstStyle/>
-          <a:p>
-            <a:pPr marL="0" indent="0">
-              <a:buNone/>
-            </a:pPr>
-            <a:r>
-              <a:rPr lang="en-US" dirty="0"/>
-              <a:t>4.2.Strengths of model</a:t>
-            </a:r>
-          </a:p>
-          <a:p>
-            <a:pPr marL="0" indent="0">
-              <a:buNone/>
-            </a:pPr>
-            <a:r>
-              <a:rPr lang="en-US" dirty="0"/>
-              <a:t>4.3.Weaknesses of model</a:t>
-            </a:r>
-          </a:p>
-          <a:p>
-            <a:pPr marL="0" indent="0">
-              <a:buNone/>
-            </a:pPr>
-            <a:r>
-              <a:rPr lang="en-US" dirty="0"/>
-              <a:t>4.4.Perspectives </a:t>
-            </a:r>
-          </a:p>
-          <a:p>
-            <a:pPr lvl="1"/>
-            <a:r>
-              <a:rPr lang="en-US" dirty="0"/>
-              <a:t>Possible improvements of the model</a:t>
-            </a:r>
-          </a:p>
-          <a:p>
-            <a:pPr lvl="1"/>
-            <a:r>
-              <a:rPr lang="en-US" dirty="0"/>
-              <a:t>Possible uses</a:t>
-            </a:r>
-          </a:p>
-          <a:p>
-            <a:endParaRPr lang="en-US" dirty="0"/>
-          </a:p>
-          <a:p>
-            <a:pPr marL="0" indent="0">
-              <a:buNone/>
-            </a:pPr>
-            <a:r>
-              <a:rPr lang="en-US" sz="4400" dirty="0">
-                <a:solidFill>
-                  <a:prstClr val="black"/>
-                </a:solidFill>
-                <a:latin typeface="Calibri Light" panose="020F0302020204030204"/>
-                <a:ea typeface="+mj-ea"/>
-                <a:cs typeface="+mj-cs"/>
-              </a:rPr>
-              <a:t>5.Conclusion</a:t>
-            </a:r>
-            <a:endParaRPr lang="en-US" dirty="0"/>
-          </a:p>
-        </p:txBody>
-      </p:sp>
-      <p:sp>
-        <p:nvSpPr>
-          <p:cNvPr id="4" name="Slide Number Placeholder 3">
-            <a:extLst>
-              <a:ext uri="{FF2B5EF4-FFF2-40B4-BE49-F238E27FC236}">
-                <a16:creationId xmlns:a16="http://schemas.microsoft.com/office/drawing/2014/main" id="{C10673C6-4EB3-4B08-8F43-1F8C3FB59557}"/>
-              </a:ext>
-            </a:extLst>
-          </p:cNvPr>
-          <p:cNvSpPr>
-            <a:spLocks noGrp="1"/>
-          </p:cNvSpPr>
-          <p:nvPr>
-            <p:ph type="sldNum" sz="quarter" idx="12"/>
-          </p:nvPr>
-        </p:nvSpPr>
-        <p:spPr/>
-        <p:txBody>
-          <a:bodyPr/>
-          <a:lstStyle/>
-          <a:p>
-            <a:fld id="{4D0921BC-FC9B-4B20-AD4C-0D7EEBC2A9A8}" type="slidenum">
-              <a:rPr lang="en-US" smtClean="0"/>
-              <a:t>19</a:t>
-            </a:fld>
-            <a:endParaRPr lang="en-US"/>
-          </a:p>
-        </p:txBody>
-      </p:sp>
-    </p:spTree>
-    <p:extLst>
-      <p:ext uri="{BB962C8B-B14F-4D97-AF65-F5344CB8AC3E}">
-        <p14:creationId xmlns:p14="http://schemas.microsoft.com/office/powerpoint/2010/main" val="3139341337"/>
       </p:ext>
     </p:extLst>
   </p:cSld>
@@ -17025,6 +17380,176 @@
     <p:extLst>
       <p:ext uri="{BB962C8B-B14F-4D97-AF65-F5344CB8AC3E}">
         <p14:creationId xmlns:p14="http://schemas.microsoft.com/office/powerpoint/2010/main" val="1669043492"/>
+      </p:ext>
+    </p:extLst>
+  </p:cSld>
+  <p:clrMapOvr>
+    <a:masterClrMapping/>
+  </p:clrMapOvr>
+</p:sld>
+</file>
+
+<file path=ppt/slides/slide20.xml><?xml version="1.0" encoding="utf-8"?>
+<p:sld xmlns:a="http://schemas.openxmlformats.org/drawingml/2006/main" xmlns:r="http://schemas.openxmlformats.org/officeDocument/2006/relationships" xmlns:p="http://schemas.openxmlformats.org/presentationml/2006/main">
+  <p:cSld>
+    <p:spTree>
+      <p:nvGrpSpPr>
+        <p:cNvPr id="1" name=""/>
+        <p:cNvGrpSpPr/>
+        <p:nvPr/>
+      </p:nvGrpSpPr>
+      <p:grpSpPr>
+        <a:xfrm>
+          <a:off x="0" y="0"/>
+          <a:ext cx="0" cy="0"/>
+          <a:chOff x="0" y="0"/>
+          <a:chExt cx="0" cy="0"/>
+        </a:xfrm>
+      </p:grpSpPr>
+      <p:sp>
+        <p:nvSpPr>
+          <p:cNvPr id="2" name="Title 1">
+            <a:extLst>
+              <a:ext uri="{FF2B5EF4-FFF2-40B4-BE49-F238E27FC236}">
+                <a16:creationId xmlns:a16="http://schemas.microsoft.com/office/drawing/2014/main" id="{00BE5BAE-891E-4107-A029-0C9F76050246}"/>
+              </a:ext>
+            </a:extLst>
+          </p:cNvPr>
+          <p:cNvSpPr>
+            <a:spLocks noGrp="1"/>
+          </p:cNvSpPr>
+          <p:nvPr>
+            <p:ph type="title"/>
+          </p:nvPr>
+        </p:nvSpPr>
+        <p:spPr/>
+        <p:txBody>
+          <a:bodyPr/>
+          <a:lstStyle/>
+          <a:p>
+            <a:r>
+              <a:rPr lang="en-US" dirty="0"/>
+              <a:t>4.Discussion</a:t>
+            </a:r>
+          </a:p>
+        </p:txBody>
+      </p:sp>
+      <p:sp>
+        <p:nvSpPr>
+          <p:cNvPr id="3" name="Content Placeholder 2">
+            <a:extLst>
+              <a:ext uri="{FF2B5EF4-FFF2-40B4-BE49-F238E27FC236}">
+                <a16:creationId xmlns:a16="http://schemas.microsoft.com/office/drawing/2014/main" id="{8FDF802E-010F-4BCC-9936-3A1A1BCBA655}"/>
+              </a:ext>
+            </a:extLst>
+          </p:cNvPr>
+          <p:cNvSpPr>
+            <a:spLocks noGrp="1"/>
+          </p:cNvSpPr>
+          <p:nvPr>
+            <p:ph idx="1"/>
+          </p:nvPr>
+        </p:nvSpPr>
+        <p:spPr/>
+        <p:txBody>
+          <a:bodyPr/>
+          <a:lstStyle/>
+          <a:p>
+            <a:pPr marL="0" indent="0">
+              <a:buNone/>
+            </a:pPr>
+            <a:r>
+              <a:rPr lang="en-US" dirty="0"/>
+              <a:t>4.2.Strengths of model</a:t>
+            </a:r>
+          </a:p>
+          <a:p>
+            <a:pPr marL="0" indent="0">
+              <a:buNone/>
+            </a:pPr>
+            <a:r>
+              <a:rPr lang="en-US" dirty="0"/>
+              <a:t>4.3.Weaknesses of model</a:t>
+            </a:r>
+          </a:p>
+          <a:p>
+            <a:pPr marL="0" indent="0">
+              <a:buNone/>
+            </a:pPr>
+            <a:r>
+              <a:rPr lang="en-US" dirty="0"/>
+              <a:t>4.4.Perspectives </a:t>
+            </a:r>
+          </a:p>
+          <a:p>
+            <a:pPr lvl="1"/>
+            <a:r>
+              <a:rPr lang="en-US" dirty="0"/>
+              <a:t>Possible improvements of the model</a:t>
+            </a:r>
+          </a:p>
+          <a:p>
+            <a:pPr lvl="1"/>
+            <a:r>
+              <a:rPr lang="en-US" dirty="0"/>
+              <a:t>Possible uses</a:t>
+            </a:r>
+          </a:p>
+          <a:p>
+            <a:endParaRPr lang="en-US" dirty="0"/>
+          </a:p>
+          <a:p>
+            <a:pPr marL="0" indent="0">
+              <a:buNone/>
+            </a:pPr>
+            <a:r>
+              <a:rPr lang="en-US" sz="4400" dirty="0">
+                <a:solidFill>
+                  <a:prstClr val="black"/>
+                </a:solidFill>
+                <a:latin typeface="Calibri Light" panose="020F0302020204030204"/>
+                <a:ea typeface="+mj-ea"/>
+                <a:cs typeface="+mj-cs"/>
+              </a:rPr>
+              <a:t>5.Conclusion</a:t>
+            </a:r>
+            <a:endParaRPr lang="en-US" dirty="0"/>
+          </a:p>
+        </p:txBody>
+      </p:sp>
+      <p:sp>
+        <p:nvSpPr>
+          <p:cNvPr id="4" name="Slide Number Placeholder 3">
+            <a:extLst>
+              <a:ext uri="{FF2B5EF4-FFF2-40B4-BE49-F238E27FC236}">
+                <a16:creationId xmlns:a16="http://schemas.microsoft.com/office/drawing/2014/main" id="{C10673C6-4EB3-4B08-8F43-1F8C3FB59557}"/>
+              </a:ext>
+            </a:extLst>
+          </p:cNvPr>
+          <p:cNvSpPr>
+            <a:spLocks noGrp="1"/>
+          </p:cNvSpPr>
+          <p:nvPr>
+            <p:ph type="sldNum" sz="quarter" idx="12"/>
+          </p:nvPr>
+        </p:nvSpPr>
+        <p:spPr/>
+        <p:txBody>
+          <a:bodyPr/>
+          <a:lstStyle/>
+          <a:p>
+            <a:fld id="{4D0921BC-FC9B-4B20-AD4C-0D7EEBC2A9A8}" type="slidenum">
+              <a:rPr lang="en-US" smtClean="0"/>
+              <a:t>20</a:t>
+            </a:fld>
+            <a:endParaRPr lang="en-US"/>
+          </a:p>
+        </p:txBody>
+      </p:sp>
+    </p:spTree>
+    <p:extLst>
+      <p:ext uri="{BB962C8B-B14F-4D97-AF65-F5344CB8AC3E}">
+        <p14:creationId xmlns:p14="http://schemas.microsoft.com/office/powerpoint/2010/main" val="3139341337"/>
       </p:ext>
     </p:extLst>
   </p:cSld>
@@ -18067,7 +18592,7 @@
             </a:r>
             <a:r>
               <a:rPr lang="en-US" dirty="0"/>
-              <a:t> et al., 2021, </a:t>
+              <a:t> et al., 2021; </a:t>
             </a:r>
             <a:r>
               <a:rPr lang="en-US" dirty="0" err="1"/>

--- a/resources/ppt_first_paper.pptx
+++ b/resources/ppt_first_paper.pptx
@@ -216,7 +216,7 @@
           <a:p>
             <a:fld id="{BD70B21E-5D10-4D67-B2AA-B5F16B5D6DF5}" type="datetimeFigureOut">
               <a:rPr lang="en-US" smtClean="0"/>
-              <a:t>11/18/2024</a:t>
+              <a:t>11/20/2024</a:t>
             </a:fld>
             <a:endParaRPr lang="en-US"/>
           </a:p>
@@ -1614,7 +1614,7 @@
           <a:p>
             <a:fld id="{7E4D1F74-A6F3-404E-BDC7-F4333547AFC5}" type="datetime1">
               <a:rPr lang="en-US" smtClean="0"/>
-              <a:t>11/18/2024</a:t>
+              <a:t>11/20/2024</a:t>
             </a:fld>
             <a:endParaRPr lang="en-US"/>
           </a:p>
@@ -1812,7 +1812,7 @@
           <a:p>
             <a:fld id="{A9A3BC48-04C9-4793-98FC-622638BB236C}" type="datetime1">
               <a:rPr lang="en-US" smtClean="0"/>
-              <a:t>11/18/2024</a:t>
+              <a:t>11/20/2024</a:t>
             </a:fld>
             <a:endParaRPr lang="en-US"/>
           </a:p>
@@ -2020,7 +2020,7 @@
           <a:p>
             <a:fld id="{70B8B28E-41C6-4AF3-8594-898D986E9E6E}" type="datetime1">
               <a:rPr lang="en-US" smtClean="0"/>
-              <a:t>11/18/2024</a:t>
+              <a:t>11/20/2024</a:t>
             </a:fld>
             <a:endParaRPr lang="en-US"/>
           </a:p>
@@ -2218,7 +2218,7 @@
           <a:p>
             <a:fld id="{6B672423-A6E0-415E-80EC-C98D7BABBA88}" type="datetime1">
               <a:rPr lang="en-US" smtClean="0"/>
-              <a:t>11/18/2024</a:t>
+              <a:t>11/20/2024</a:t>
             </a:fld>
             <a:endParaRPr lang="en-US"/>
           </a:p>
@@ -2493,7 +2493,7 @@
           <a:p>
             <a:fld id="{FF6ED73A-8C86-4FCB-9A91-E8C51402F3A2}" type="datetime1">
               <a:rPr lang="en-US" smtClean="0"/>
-              <a:t>11/18/2024</a:t>
+              <a:t>11/20/2024</a:t>
             </a:fld>
             <a:endParaRPr lang="en-US"/>
           </a:p>
@@ -2758,7 +2758,7 @@
           <a:p>
             <a:fld id="{DB15C31A-116B-46B1-BCEF-7A27890F74C4}" type="datetime1">
               <a:rPr lang="en-US" smtClean="0"/>
-              <a:t>11/18/2024</a:t>
+              <a:t>11/20/2024</a:t>
             </a:fld>
             <a:endParaRPr lang="en-US"/>
           </a:p>
@@ -3170,7 +3170,7 @@
           <a:p>
             <a:fld id="{54250EC2-844E-41B5-BBDF-73A89F6588DF}" type="datetime1">
               <a:rPr lang="en-US" smtClean="0"/>
-              <a:t>11/18/2024</a:t>
+              <a:t>11/20/2024</a:t>
             </a:fld>
             <a:endParaRPr lang="en-US"/>
           </a:p>
@@ -3311,7 +3311,7 @@
           <a:p>
             <a:fld id="{CE82E0A7-92AF-4745-BCA1-599ECD02E67F}" type="datetime1">
               <a:rPr lang="en-US" smtClean="0"/>
-              <a:t>11/18/2024</a:t>
+              <a:t>11/20/2024</a:t>
             </a:fld>
             <a:endParaRPr lang="en-US"/>
           </a:p>
@@ -3424,7 +3424,7 @@
           <a:p>
             <a:fld id="{9D35E66C-7C8E-4FED-A762-7062D27E2111}" type="datetime1">
               <a:rPr lang="en-US" smtClean="0"/>
-              <a:t>11/18/2024</a:t>
+              <a:t>11/20/2024</a:t>
             </a:fld>
             <a:endParaRPr lang="en-US"/>
           </a:p>
@@ -3735,7 +3735,7 @@
           <a:p>
             <a:fld id="{74FDD5E7-8180-49E2-853B-8300CA7870D9}" type="datetime1">
               <a:rPr lang="en-US" smtClean="0"/>
-              <a:t>11/18/2024</a:t>
+              <a:t>11/20/2024</a:t>
             </a:fld>
             <a:endParaRPr lang="en-US"/>
           </a:p>
@@ -4023,7 +4023,7 @@
           <a:p>
             <a:fld id="{18F7B161-BA87-40A6-B2A2-26EB11F75897}" type="datetime1">
               <a:rPr lang="en-US" smtClean="0"/>
-              <a:t>11/18/2024</a:t>
+              <a:t>11/20/2024</a:t>
             </a:fld>
             <a:endParaRPr lang="en-US"/>
           </a:p>
@@ -4264,7 +4264,7 @@
           <a:p>
             <a:fld id="{ADD9512A-AD81-4E5D-AC91-CE42C6763460}" type="datetime1">
               <a:rPr lang="en-US" smtClean="0"/>
-              <a:t>11/18/2024</a:t>
+              <a:t>11/20/2024</a:t>
             </a:fld>
             <a:endParaRPr lang="en-US"/>
           </a:p>
@@ -15233,6 +15233,94 @@
           </a:p>
         </p:txBody>
       </p:sp>
+      <p:sp>
+        <p:nvSpPr>
+          <p:cNvPr id="9" name="TextBox 8">
+            <a:extLst>
+              <a:ext uri="{FF2B5EF4-FFF2-40B4-BE49-F238E27FC236}">
+                <a16:creationId xmlns:a16="http://schemas.microsoft.com/office/drawing/2014/main" id="{1C09A54A-788C-40CF-BAD0-B9118D0D5CC0}"/>
+              </a:ext>
+            </a:extLst>
+          </p:cNvPr>
+          <p:cNvSpPr txBox="1"/>
+          <p:nvPr/>
+        </p:nvSpPr>
+        <p:spPr>
+          <a:xfrm>
+            <a:off x="196364" y="3968466"/>
+            <a:ext cx="1733499" cy="1477328"/>
+          </a:xfrm>
+          <a:prstGeom prst="rect">
+            <a:avLst/>
+          </a:prstGeom>
+          <a:noFill/>
+        </p:spPr>
+        <p:txBody>
+          <a:bodyPr wrap="square" rtlCol="0">
+            <a:spAutoFit/>
+          </a:bodyPr>
+          <a:lstStyle/>
+          <a:p>
+            <a:r>
+              <a:rPr lang="fr-FR" dirty="0"/>
+              <a:t>Compare </a:t>
+            </a:r>
+            <a:r>
+              <a:rPr lang="fr-FR" dirty="0" err="1"/>
+              <a:t>organ</a:t>
+            </a:r>
+            <a:r>
+              <a:rPr lang="fr-FR" dirty="0"/>
+              <a:t> </a:t>
+            </a:r>
+            <a:r>
+              <a:rPr lang="fr-FR" dirty="0" err="1"/>
+              <a:t>growth</a:t>
+            </a:r>
+            <a:r>
+              <a:rPr lang="fr-FR" dirty="0"/>
+              <a:t> </a:t>
+            </a:r>
+            <a:r>
+              <a:rPr lang="fr-FR" dirty="0" err="1"/>
+              <a:t>dynamics</a:t>
+            </a:r>
+            <a:r>
+              <a:rPr lang="fr-FR" dirty="0"/>
+              <a:t> </a:t>
+            </a:r>
+            <a:r>
+              <a:rPr lang="fr-FR" dirty="0" err="1"/>
+              <a:t>with</a:t>
+            </a:r>
+            <a:r>
+              <a:rPr lang="fr-FR" dirty="0"/>
+              <a:t> </a:t>
+            </a:r>
+            <a:r>
+              <a:rPr lang="fr-FR" dirty="0" err="1"/>
+              <a:t>Kaitaniemi</a:t>
+            </a:r>
+            <a:r>
+              <a:rPr lang="fr-FR" dirty="0"/>
+              <a:t> 1999</a:t>
+            </a:r>
+            <a:r>
+              <a:rPr lang="en-US"/>
+              <a:t>; Lafarge</a:t>
+            </a:r>
+            <a:r>
+              <a:rPr lang="fr-FR"/>
+              <a:t> </a:t>
+            </a:r>
+            <a:r>
+              <a:rPr lang="fr-FR" dirty="0"/>
+              <a:t>? </a:t>
+            </a:r>
+            <a:endParaRPr lang="en-US" dirty="0"/>
+          </a:p>
+        </p:txBody>
+      </p:sp>
     </p:spTree>
     <p:extLst>
       <p:ext uri="{BB962C8B-B14F-4D97-AF65-F5344CB8AC3E}">
